--- a/tests/fixtures/clean.pptx
+++ b/tests/fixtures/clean.pptx
@@ -12,6 +12,171 @@
 </p:presentation>
 </file>
 
+<file path=ppt/slideLayouts/slideLayout1.xml><?xml version="1.0" encoding="utf-8"?>
+<p:sldLayout xmlns:a="http://schemas.openxmlformats.org/drawingml/2006/main" xmlns:r="http://schemas.openxmlformats.org/officeDocument/2006/relationships" xmlns:p="http://schemas.openxmlformats.org/presentationml/2006/main" type="title">
+  <p:cSld>
+    <p:spTree>
+      <p:nvGrpSpPr>
+        <p:cNvPr id="1" name="Shape Tree"/>
+        <p:cNvGrpSpPr/>
+        <p:nvPr/>
+      </p:nvGrpSpPr>
+      <p:grpSpPr/>
+      <p:sp>
+        <p:nvSpPr>
+          <p:cNvPr id="2" name="Title Placeholder"/>
+          <p:cNvSpPr/>
+          <p:nvPr>
+            <p:ph type="title"/>
+          </p:nvPr>
+        </p:nvSpPr>
+        <p:spPr>
+          <a:xfrm>
+            <a:off x="838200" y="365125"/>
+            <a:ext cx="10515600" cy="1325563"/>
+          </a:xfrm>
+          <a:prstGeom prst="rect">
+            <a:avLst/>
+          </a:prstGeom>
+        </p:spPr>
+        <p:txBody>
+          <a:bodyPr/>
+          <a:lstStyle>
+            <a:lvl1pPr rtl="1" algn="r"/>
+          </a:lstStyle>
+          <a:p>
+            <a:endParaRPr/>
+          </a:p>
+        </p:txBody>
+      </p:sp>
+      <p:sp>
+        <p:nvSpPr>
+          <p:cNvPr id="3" name="Body Placeholder"/>
+          <p:cNvSpPr/>
+          <p:nvPr>
+            <p:ph type="body" idx="1"/>
+          </p:nvPr>
+        </p:nvSpPr>
+        <p:spPr>
+          <a:xfrm>
+            <a:off x="838200" y="1825625"/>
+            <a:ext cx="10515600" cy="1325563"/>
+          </a:xfrm>
+          <a:prstGeom prst="rect">
+            <a:avLst/>
+          </a:prstGeom>
+        </p:spPr>
+        <p:txBody>
+          <a:bodyPr/>
+          <a:lstStyle>
+            <a:lvl1pPr rtl="1" algn="r"/>
+          </a:lstStyle>
+          <a:p>
+            <a:endParaRPr/>
+          </a:p>
+        </p:txBody>
+      </p:sp>
+    </p:spTree>
+  </p:cSld>
+  <p:clrMapOvr>
+    <a:masterClrMapping/>
+  </p:clrMapOvr>
+</p:sldLayout>
+</file>
+
+<file path=ppt/slideMasters/slideMaster1.xml><?xml version="1.0" encoding="utf-8"?>
+<p:sldMaster xmlns:a="http://schemas.openxmlformats.org/drawingml/2006/main" xmlns:r="http://schemas.openxmlformats.org/officeDocument/2006/relationships" xmlns:p="http://schemas.openxmlformats.org/presentationml/2006/main">
+  <p:cSld>
+    <p:spTree>
+      <p:nvGrpSpPr>
+        <p:cNvPr id="1" name="Shape Tree"/>
+        <p:cNvGrpSpPr/>
+        <p:nvPr/>
+      </p:nvGrpSpPr>
+      <p:grpSpPr/>
+      <p:sp>
+        <p:nvSpPr>
+          <p:cNvPr id="2" name="Title Placeholder"/>
+          <p:cNvSpPr/>
+          <p:nvPr>
+            <p:ph type="title"/>
+          </p:nvPr>
+        </p:nvSpPr>
+        <p:spPr>
+          <a:xfrm>
+            <a:off x="838200" y="365125"/>
+            <a:ext cx="10515600" cy="1325563"/>
+          </a:xfrm>
+          <a:prstGeom prst="rect">
+            <a:avLst/>
+          </a:prstGeom>
+        </p:spPr>
+        <p:txBody>
+          <a:bodyPr/>
+          <a:lstStyle/>
+          <a:p>
+            <a:endParaRPr/>
+          </a:p>
+        </p:txBody>
+      </p:sp>
+      <p:sp>
+        <p:nvSpPr>
+          <p:cNvPr id="3" name="Body Placeholder"/>
+          <p:cNvSpPr/>
+          <p:nvPr>
+            <p:ph type="body" idx="1"/>
+          </p:nvPr>
+        </p:nvSpPr>
+        <p:spPr>
+          <a:xfrm>
+            <a:off x="838200" y="1825625"/>
+            <a:ext cx="10515600" cy="1325563"/>
+          </a:xfrm>
+          <a:prstGeom prst="rect">
+            <a:avLst/>
+          </a:prstGeom>
+        </p:spPr>
+        <p:txBody>
+          <a:bodyPr/>
+          <a:lstStyle/>
+          <a:p>
+            <a:endParaRPr/>
+          </a:p>
+        </p:txBody>
+      </p:sp>
+    </p:spTree>
+  </p:cSld>
+  <p:clrMap bg1="lt1" tx1="dk1" bg2="lt2" tx2="dk2" accent1="accent1" accent2="accent2" accent3="accent3" accent4="accent4" accent5="accent5" accent6="accent6" hlink="hlink" folHlink="folHlink"/>
+  <p:sldLayoutIdLst>
+    <p:sldLayoutId id="2147483649" r:id="rId1"/>
+  </p:sldLayoutIdLst>
+  <p:txStyles>
+    <p:titleStyle>
+      <a:lvl1pPr rtl="1" algn="r">
+        <a:defRPr lang="ar-SA">
+          <a:cs typeface="Dubai"/>
+        </a:defRPr>
+      </a:lvl1pPr>
+    </p:titleStyle>
+    <p:bodyStyle>
+      <a:lvl1pPr rtl="1" algn="r">
+        <a:buNone/>
+        <a:defRPr lang="ar-SA">
+          <a:cs typeface="Dubai"/>
+        </a:defRPr>
+      </a:lvl1pPr>
+    </p:bodyStyle>
+    <p:otherStyle>
+      <a:lvl1pPr rtl="1" algn="r">
+        <a:defRPr lang="ar-SA">
+          <a:cs typeface="Dubai"/>
+        </a:defRPr>
+      </a:lvl1pPr>
+    </p:otherStyle>
+  </p:txStyles>
+</p:sldMaster>
+</file>
+
 <file path=ppt/slides/slide1.xml><?xml version="1.0" encoding="utf-8"?>
 <p:sld xmlns:a="http://schemas.openxmlformats.org/drawingml/2006/main" xmlns:r="http://schemas.openxmlformats.org/officeDocument/2006/relationships" xmlns:p="http://schemas.openxmlformats.org/presentationml/2006/main">
   <p:cSld>
@@ -21,6 +186,7 @@
         <p:cNvGrpSpPr/>
         <p:nvPr/>
       </p:nvGrpSpPr>
+      <p:grpSpPr/>
       <p:sp>
         <p:nvSpPr>
           <p:cNvPr id="2" name="Title 1"/>
@@ -57,5 +223,117 @@
       </p:sp>
     </p:spTree>
   </p:cSld>
+  <p:clrMapOvr>
+    <a:masterClrMapping/>
+  </p:clrMapOvr>
 </p:sld>
+</file>
+
+<file path=ppt/theme/theme1.xml><?xml version="1.0" encoding="utf-8"?>
+<a:theme xmlns:a="http://schemas.openxmlformats.org/drawingml/2006/main" name="Office">
+  <a:themeElements>
+    <a:clrScheme name="Office">
+      <a:dk1>
+        <a:sysClr val="windowText" lastClr="000000"/>
+      </a:dk1>
+      <a:lt1>
+        <a:sysClr val="window" lastClr="FFFFFF"/>
+      </a:lt1>
+      <a:dk2>
+        <a:srgbClr val="44546A"/>
+      </a:dk2>
+      <a:lt2>
+        <a:srgbClr val="E7E6E6"/>
+      </a:lt2>
+      <a:accent1>
+        <a:srgbClr val="4472C4"/>
+      </a:accent1>
+      <a:accent2>
+        <a:srgbClr val="ED7D31"/>
+      </a:accent2>
+      <a:accent3>
+        <a:srgbClr val="A5A5A5"/>
+      </a:accent3>
+      <a:accent4>
+        <a:srgbClr val="FFC000"/>
+      </a:accent4>
+      <a:accent5>
+        <a:srgbClr val="5B9BD5"/>
+      </a:accent5>
+      <a:accent6>
+        <a:srgbClr val="70AD47"/>
+      </a:accent6>
+      <a:hlink>
+        <a:srgbClr val="0563C1"/>
+      </a:hlink>
+      <a:folHlink>
+        <a:srgbClr val="954F72"/>
+      </a:folHlink>
+    </a:clrScheme>
+    <a:fontScheme name="Office">
+      <a:majorFont>
+        <a:latin typeface="Calibri Light"/>
+        <a:ea typeface=""/>
+        <a:cs typeface="Dubai"/>
+      </a:majorFont>
+      <a:minorFont>
+        <a:latin typeface="Calibri"/>
+        <a:ea typeface=""/>
+        <a:cs typeface="Dubai"/>
+      </a:minorFont>
+    </a:fontScheme>
+    <a:fmtScheme name="Office">
+      <a:fillStyleLst>
+        <a:solidFill>
+          <a:schemeClr val="phClr"/>
+        </a:solidFill>
+        <a:solidFill>
+          <a:schemeClr val="phClr"/>
+        </a:solidFill>
+        <a:solidFill>
+          <a:schemeClr val="phClr"/>
+        </a:solidFill>
+      </a:fillStyleLst>
+      <a:lnStyleLst>
+        <a:ln w="6350">
+          <a:solidFill>
+            <a:schemeClr val="phClr"/>
+          </a:solidFill>
+        </a:ln>
+        <a:ln w="6350">
+          <a:solidFill>
+            <a:schemeClr val="phClr"/>
+          </a:solidFill>
+        </a:ln>
+        <a:ln w="6350">
+          <a:solidFill>
+            <a:schemeClr val="phClr"/>
+          </a:solidFill>
+        </a:ln>
+      </a:lnStyleLst>
+      <a:effectStyleLst>
+        <a:effectStyle>
+          <a:effectLst/>
+        </a:effectStyle>
+        <a:effectStyle>
+          <a:effectLst/>
+        </a:effectStyle>
+        <a:effectStyle>
+          <a:effectLst/>
+        </a:effectStyle>
+      </a:effectStyleLst>
+      <a:bgFillStyleLst>
+        <a:solidFill>
+          <a:schemeClr val="phClr"/>
+        </a:solidFill>
+        <a:solidFill>
+          <a:schemeClr val="phClr"/>
+        </a:solidFill>
+        <a:solidFill>
+          <a:schemeClr val="phClr"/>
+        </a:solidFill>
+      </a:bgFillStyleLst>
+    </a:fmtScheme>
+  </a:themeElements>
+</a:theme>
 </file>
--- a/tests/fixtures/clean.pptx
+++ b/tests/fixtures/clean.pptx
@@ -217,6 +217,44 @@
                 <a:cs typeface="Dubai"/>
               </a:rPr>
               <a:t>بند أول</a:t>
+            </a:r>
+          </a:p>
+        </p:txBody>
+      </p:sp>
+      <p:sp>
+        <p:nvSpPr>
+          <p:cNvPr id="3" name="Columns 2"/>
+          <p:cNvSpPr txBox="1"/>
+          <p:nvPr/>
+        </p:nvSpPr>
+        <p:spPr>
+          <a:xfrm>
+            <a:off x="838200" y="3300000"/>
+            <a:ext cx="10515600" cy="2000000"/>
+          </a:xfrm>
+          <a:prstGeom prst="rect">
+            <a:avLst/>
+          </a:prstGeom>
+        </p:spPr>
+        <p:txBody>
+          <a:bodyPr numCol="2" rtlCol="1"/>
+          <a:lstStyle/>
+          <a:p>
+            <a:pPr rtl="1" algn="r"/>
+            <a:r>
+              <a:rPr lang="ar-SA">
+                <a:cs typeface="Dubai"/>
+              </a:rPr>
+              <a:t>العمود الأول من النص المتصل.</a:t>
+            </a:r>
+          </a:p>
+          <a:p>
+            <a:pPr rtl="1" algn="r"/>
+            <a:r>
+              <a:rPr lang="ar-SA">
+                <a:cs typeface="Dubai"/>
+              </a:rPr>
+              <a:t>العمود الثاني من النص المتصل.</a:t>
             </a:r>
           </a:p>
         </p:txBody>

--- a/tests/fixtures/clean.pptx
+++ b/tests/fixtures/clean.pptx
@@ -154,7 +154,7 @@
     <p:titleStyle>
       <a:lvl1pPr rtl="1" algn="r">
         <a:defRPr lang="ar-SA">
-          <a:cs typeface="Dubai"/>
+          <a:cs typeface="+mj-cs"/>
         </a:defRPr>
       </a:lvl1pPr>
     </p:titleStyle>
@@ -162,7 +162,7 @@
       <a:lvl1pPr rtl="1" algn="r">
         <a:buNone/>
         <a:defRPr lang="ar-SA">
-          <a:cs typeface="Dubai"/>
+          <a:cs typeface="+mn-cs"/>
         </a:defRPr>
       </a:lvl1pPr>
     </p:bodyStyle>
